--- a/data/deep_dives/carteira_fic_fidc_via_cdf08645/exports/documentary_comparison.pptx
+++ b/data/deep_dives/carteira_fic_fidc_via_cdf08645/exports/documentary_comparison.pptx
@@ -4437,7 +4437,7 @@
         </p:nvGraphicFramePr>
         <p:xfrm>
           <a:off x="438912" y="932688"/>
-          <a:ext cx="11313870" cy="3218688"/>
+          <a:ext cx="11313870" cy="2468880"/>
         </p:xfrm>
         <a:graphic>
           <a:graphicData uri="http://schemas.openxmlformats.org/drawingml/2006/table">
@@ -4472,7 +4472,7 @@
                       <a:r>
                         <a:rPr sz="1300" b="1">
                           <a:solidFill>
-                            <a:srgbClr val="1F1F1F"/>
+                            <a:srgbClr val="FFFFFF"/>
                           </a:solidFill>
                           <a:latin typeface="Calibri"/>
                         </a:rPr>
@@ -4482,7 +4482,7 @@
                   </a:txBody>
                   <a:tcPr marL="91440" marR="91440" marT="41148" marB="41148" anchor="ctr">
                     <a:solidFill>
-                      <a:srgbClr val="EC7000"/>
+                      <a:srgbClr val="FF6200"/>
                     </a:solidFill>
                     <a:lnL>
                       <a:noFill/>
@@ -4521,7 +4521,7 @@
                       <a:r>
                         <a:rPr sz="1300" b="1">
                           <a:solidFill>
-                            <a:srgbClr val="1F1F1F"/>
+                            <a:srgbClr val="FFFFFF"/>
                           </a:solidFill>
                           <a:latin typeface="Calibri"/>
                         </a:rPr>
@@ -4531,7 +4531,7 @@
                   </a:txBody>
                   <a:tcPr marL="91440" marR="91440" marT="41148" marB="41148" anchor="ctr">
                     <a:solidFill>
-                      <a:srgbClr val="EC7000"/>
+                      <a:srgbClr val="FF6200"/>
                     </a:solidFill>
                     <a:lnL>
                       <a:noFill/>
@@ -4570,7 +4570,7 @@
                       <a:r>
                         <a:rPr sz="1300" b="1">
                           <a:solidFill>
-                            <a:srgbClr val="1F1F1F"/>
+                            <a:srgbClr val="FFFFFF"/>
                           </a:solidFill>
                           <a:latin typeface="Calibri"/>
                         </a:rPr>
@@ -4580,7 +4580,7 @@
                   </a:txBody>
                   <a:tcPr marL="91440" marR="91440" marT="41148" marB="41148" anchor="ctr">
                     <a:solidFill>
-                      <a:srgbClr val="EC7000"/>
+                      <a:srgbClr val="FF6200"/>
                     </a:solidFill>
                     <a:lnL>
                       <a:noFill/>
@@ -4786,7 +4786,7 @@
                   </a:tcPr>
                 </a:tc>
               </a:tr>
-              <a:tr h="470916">
+              <a:tr h="283464">
                 <a:tc>
                   <a:txBody>
                     <a:bodyPr wrap="square">
@@ -4859,29 +4859,7 @@
                           </a:solidFill>
                           <a:latin typeface="Calibri"/>
                         </a:rPr>
-                        <a:t>Não localizado nas cláusulas revisadas; requer</a:t>
-                      </a:r>
-                    </a:p>
-                    <a:p>
-                      <a:pPr algn="ctr">
-                        <a:lnSpc>
-                          <a:spcPct val="100000"/>
-                        </a:lnSpc>
-                        <a:spcBef>
-                          <a:spcPts val="0"/>
-                        </a:spcBef>
-                        <a:spcAft>
-                          <a:spcPts val="0"/>
-                        </a:spcAft>
-                      </a:pPr>
-                      <a:r>
-                        <a:rPr sz="1300" b="0">
-                          <a:solidFill>
-                            <a:srgbClr val="1F1F1F"/>
-                          </a:solidFill>
-                          <a:latin typeface="Calibri"/>
-                        </a:rPr>
-                        <a:t>documento aplicável</a:t>
+                        <a:t>-</a:t>
                       </a:r>
                     </a:p>
                   </a:txBody>
@@ -4928,29 +4906,7 @@
                           </a:solidFill>
                           <a:latin typeface="Calibri"/>
                         </a:rPr>
-                        <a:t>Não localizado nas cláusulas revisadas; requer</a:t>
-                      </a:r>
-                    </a:p>
-                    <a:p>
-                      <a:pPr algn="ctr">
-                        <a:lnSpc>
-                          <a:spcPct val="100000"/>
-                        </a:lnSpc>
-                        <a:spcBef>
-                          <a:spcPts val="0"/>
-                        </a:spcBef>
-                        <a:spcAft>
-                          <a:spcPts val="0"/>
-                        </a:spcAft>
-                      </a:pPr>
-                      <a:r>
-                        <a:rPr sz="1300" b="0">
-                          <a:solidFill>
-                            <a:srgbClr val="1F1F1F"/>
-                          </a:solidFill>
-                          <a:latin typeface="Calibri"/>
-                        </a:rPr>
-                        <a:t>documento aplicável</a:t>
+                        <a:t>-</a:t>
                       </a:r>
                     </a:p>
                   </a:txBody>
@@ -4973,7 +4929,7 @@
                   </a:tcPr>
                 </a:tc>
               </a:tr>
-              <a:tr h="470916">
+              <a:tr h="283464">
                 <a:tc>
                   <a:txBody>
                     <a:bodyPr wrap="square">
@@ -5046,29 +5002,7 @@
                           </a:solidFill>
                           <a:latin typeface="Calibri"/>
                         </a:rPr>
-                        <a:t>Não localizado nas cláusulas revisadas; requer</a:t>
-                      </a:r>
-                    </a:p>
-                    <a:p>
-                      <a:pPr algn="ctr">
-                        <a:lnSpc>
-                          <a:spcPct val="100000"/>
-                        </a:lnSpc>
-                        <a:spcBef>
-                          <a:spcPts val="0"/>
-                        </a:spcBef>
-                        <a:spcAft>
-                          <a:spcPts val="0"/>
-                        </a:spcAft>
-                      </a:pPr>
-                      <a:r>
-                        <a:rPr sz="1300" b="0">
-                          <a:solidFill>
-                            <a:srgbClr val="1F1F1F"/>
-                          </a:solidFill>
-                          <a:latin typeface="Calibri"/>
-                        </a:rPr>
-                        <a:t>documento aplicável</a:t>
+                        <a:t>-</a:t>
                       </a:r>
                     </a:p>
                   </a:txBody>
@@ -5115,29 +5049,7 @@
                           </a:solidFill>
                           <a:latin typeface="Calibri"/>
                         </a:rPr>
-                        <a:t>Não localizado nas cláusulas revisadas; requer</a:t>
-                      </a:r>
-                    </a:p>
-                    <a:p>
-                      <a:pPr algn="ctr">
-                        <a:lnSpc>
-                          <a:spcPct val="100000"/>
-                        </a:lnSpc>
-                        <a:spcBef>
-                          <a:spcPts val="0"/>
-                        </a:spcBef>
-                        <a:spcAft>
-                          <a:spcPts val="0"/>
-                        </a:spcAft>
-                      </a:pPr>
-                      <a:r>
-                        <a:rPr sz="1300" b="0">
-                          <a:solidFill>
-                            <a:srgbClr val="1F1F1F"/>
-                          </a:solidFill>
-                          <a:latin typeface="Calibri"/>
-                        </a:rPr>
-                        <a:t>documento aplicável</a:t>
+                        <a:t>-</a:t>
                       </a:r>
                     </a:p>
                   </a:txBody>
@@ -5160,7 +5072,7 @@
                   </a:tcPr>
                 </a:tc>
               </a:tr>
-              <a:tr h="470916">
+              <a:tr h="283464">
                 <a:tc>
                   <a:txBody>
                     <a:bodyPr wrap="square">
@@ -5233,29 +5145,7 @@
                           </a:solidFill>
                           <a:latin typeface="Calibri"/>
                         </a:rPr>
-                        <a:t>Não localizado nas cláusulas revisadas; requer</a:t>
-                      </a:r>
-                    </a:p>
-                    <a:p>
-                      <a:pPr algn="ctr">
-                        <a:lnSpc>
-                          <a:spcPct val="100000"/>
-                        </a:lnSpc>
-                        <a:spcBef>
-                          <a:spcPts val="0"/>
-                        </a:spcBef>
-                        <a:spcAft>
-                          <a:spcPts val="0"/>
-                        </a:spcAft>
-                      </a:pPr>
-                      <a:r>
-                        <a:rPr sz="1300" b="0">
-                          <a:solidFill>
-                            <a:srgbClr val="1F1F1F"/>
-                          </a:solidFill>
-                          <a:latin typeface="Calibri"/>
-                        </a:rPr>
-                        <a:t>documento aplicável</a:t>
+                        <a:t>-</a:t>
                       </a:r>
                     </a:p>
                   </a:txBody>
@@ -5302,29 +5192,7 @@
                           </a:solidFill>
                           <a:latin typeface="Calibri"/>
                         </a:rPr>
-                        <a:t>Não localizado nas cláusulas revisadas; requer</a:t>
-                      </a:r>
-                    </a:p>
-                    <a:p>
-                      <a:pPr algn="ctr">
-                        <a:lnSpc>
-                          <a:spcPct val="100000"/>
-                        </a:lnSpc>
-                        <a:spcBef>
-                          <a:spcPts val="0"/>
-                        </a:spcBef>
-                        <a:spcAft>
-                          <a:spcPts val="0"/>
-                        </a:spcAft>
-                      </a:pPr>
-                      <a:r>
-                        <a:rPr sz="1300" b="0">
-                          <a:solidFill>
-                            <a:srgbClr val="1F1F1F"/>
-                          </a:solidFill>
-                          <a:latin typeface="Calibri"/>
-                        </a:rPr>
-                        <a:t>documento aplicável</a:t>
+                        <a:t>-</a:t>
                       </a:r>
                     </a:p>
                   </a:txBody>
@@ -5347,7 +5215,7 @@
                   </a:tcPr>
                 </a:tc>
               </a:tr>
-              <a:tr h="470916">
+              <a:tr h="283464">
                 <a:tc>
                   <a:txBody>
                     <a:bodyPr wrap="square">
@@ -5420,29 +5288,7 @@
                           </a:solidFill>
                           <a:latin typeface="Calibri"/>
                         </a:rPr>
-                        <a:t>Não localizado nas cláusulas revisadas; requer</a:t>
-                      </a:r>
-                    </a:p>
-                    <a:p>
-                      <a:pPr algn="ctr">
-                        <a:lnSpc>
-                          <a:spcPct val="100000"/>
-                        </a:lnSpc>
-                        <a:spcBef>
-                          <a:spcPts val="0"/>
-                        </a:spcBef>
-                        <a:spcAft>
-                          <a:spcPts val="0"/>
-                        </a:spcAft>
-                      </a:pPr>
-                      <a:r>
-                        <a:rPr sz="1300" b="0">
-                          <a:solidFill>
-                            <a:srgbClr val="1F1F1F"/>
-                          </a:solidFill>
-                          <a:latin typeface="Calibri"/>
-                        </a:rPr>
-                        <a:t>documento aplicável</a:t>
+                        <a:t>-</a:t>
                       </a:r>
                     </a:p>
                   </a:txBody>
@@ -5489,29 +5335,7 @@
                           </a:solidFill>
                           <a:latin typeface="Calibri"/>
                         </a:rPr>
-                        <a:t>Não localizado nas cláusulas revisadas; requer</a:t>
-                      </a:r>
-                    </a:p>
-                    <a:p>
-                      <a:pPr algn="ctr">
-                        <a:lnSpc>
-                          <a:spcPct val="100000"/>
-                        </a:lnSpc>
-                        <a:spcBef>
-                          <a:spcPts val="0"/>
-                        </a:spcBef>
-                        <a:spcAft>
-                          <a:spcPts val="0"/>
-                        </a:spcAft>
-                      </a:pPr>
-                      <a:r>
-                        <a:rPr sz="1300" b="0">
-                          <a:solidFill>
-                            <a:srgbClr val="1F1F1F"/>
-                          </a:solidFill>
-                          <a:latin typeface="Calibri"/>
-                        </a:rPr>
-                        <a:t>documento aplicável</a:t>
+                        <a:t>-</a:t>
                       </a:r>
                     </a:p>
                   </a:txBody>
@@ -5680,29 +5504,7 @@
                           </a:solidFill>
                           <a:latin typeface="Calibri"/>
                         </a:rPr>
-                        <a:t>Não localizado nas cláusulas revisadas; requer</a:t>
-                      </a:r>
-                    </a:p>
-                    <a:p>
-                      <a:pPr algn="ctr">
-                        <a:lnSpc>
-                          <a:spcPct val="100000"/>
-                        </a:lnSpc>
-                        <a:spcBef>
-                          <a:spcPts val="0"/>
-                        </a:spcBef>
-                        <a:spcAft>
-                          <a:spcPts val="0"/>
-                        </a:spcAft>
-                      </a:pPr>
-                      <a:r>
-                        <a:rPr sz="1300" b="0">
-                          <a:solidFill>
-                            <a:srgbClr val="1F1F1F"/>
-                          </a:solidFill>
-                          <a:latin typeface="Calibri"/>
-                        </a:rPr>
-                        <a:t>documento aplicável</a:t>
+                        <a:t>-</a:t>
                       </a:r>
                     </a:p>
                   </a:txBody>
@@ -5872,7 +5674,7 @@
         </p:nvGraphicFramePr>
         <p:xfrm>
           <a:off x="438912" y="932688"/>
-          <a:ext cx="11313870" cy="2747772"/>
+          <a:ext cx="11313870" cy="2372868"/>
         </p:xfrm>
         <a:graphic>
           <a:graphicData uri="http://schemas.openxmlformats.org/drawingml/2006/table">
@@ -5907,7 +5709,7 @@
                       <a:r>
                         <a:rPr sz="1300" b="1">
                           <a:solidFill>
-                            <a:srgbClr val="1F1F1F"/>
+                            <a:srgbClr val="FFFFFF"/>
                           </a:solidFill>
                           <a:latin typeface="Calibri"/>
                         </a:rPr>
@@ -5917,7 +5719,7 @@
                   </a:txBody>
                   <a:tcPr marL="91440" marR="91440" marT="41148" marB="41148" anchor="ctr">
                     <a:solidFill>
-                      <a:srgbClr val="EC7000"/>
+                      <a:srgbClr val="FF6200"/>
                     </a:solidFill>
                     <a:lnL>
                       <a:noFill/>
@@ -5956,7 +5758,7 @@
                       <a:r>
                         <a:rPr sz="1300" b="1">
                           <a:solidFill>
-                            <a:srgbClr val="1F1F1F"/>
+                            <a:srgbClr val="FFFFFF"/>
                           </a:solidFill>
                           <a:latin typeface="Calibri"/>
                         </a:rPr>
@@ -5966,7 +5768,7 @@
                   </a:txBody>
                   <a:tcPr marL="91440" marR="91440" marT="41148" marB="41148" anchor="ctr">
                     <a:solidFill>
-                      <a:srgbClr val="EC7000"/>
+                      <a:srgbClr val="FF6200"/>
                     </a:solidFill>
                     <a:lnL>
                       <a:noFill/>
@@ -6005,7 +5807,7 @@
                       <a:r>
                         <a:rPr sz="1300" b="1">
                           <a:solidFill>
-                            <a:srgbClr val="1F1F1F"/>
+                            <a:srgbClr val="FFFFFF"/>
                           </a:solidFill>
                           <a:latin typeface="Calibri"/>
                         </a:rPr>
@@ -6015,7 +5817,7 @@
                   </a:txBody>
                   <a:tcPr marL="91440" marR="91440" marT="41148" marB="41148" anchor="ctr">
                     <a:solidFill>
-                      <a:srgbClr val="EC7000"/>
+                      <a:srgbClr val="FF6200"/>
                     </a:solidFill>
                     <a:lnL>
                       <a:noFill/>
@@ -6107,29 +5909,7 @@
                           </a:solidFill>
                           <a:latin typeface="Calibri"/>
                         </a:rPr>
-                        <a:t>Razão sênior ≥125%; mezanino ≥111,11%; validar</a:t>
-                      </a:r>
-                    </a:p>
-                    <a:p>
-                      <a:pPr algn="ctr">
-                        <a:lnSpc>
-                          <a:spcPct val="100000"/>
-                        </a:lnSpc>
-                        <a:spcBef>
-                          <a:spcPts val="0"/>
-                        </a:spcBef>
-                        <a:spcAft>
-                          <a:spcPts val="0"/>
-                        </a:spcAft>
-                      </a:pPr>
-                      <a:r>
-                        <a:rPr sz="1300" b="0">
-                          <a:solidFill>
-                            <a:srgbClr val="1F1F1F"/>
-                          </a:solidFill>
-                          <a:latin typeface="Calibri"/>
-                        </a:rPr>
-                        <a:t>definição contratual do numerador</a:t>
+                        <a:t>Razão sênior ≥125%; mezanino ≥111,11%</a:t>
                       </a:r>
                     </a:p>
                   </a:txBody>
@@ -6385,9 +6165,83 @@
                           </a:solidFill>
                           <a:latin typeface="Calibri"/>
                         </a:rPr>
-                        <a:t>Não localizado nas cláusulas revisadas; requer</a:t>
-                      </a:r>
-                    </a:p>
+                        <a:t>-</a:t>
+                      </a:r>
+                    </a:p>
+                  </a:txBody>
+                  <a:tcPr marL="91440" marR="91440" marT="41148" marB="41148" anchor="ctr">
+                    <a:solidFill>
+                      <a:srgbClr val="FFFFFF"/>
+                    </a:solidFill>
+                    <a:lnL>
+                      <a:noFill/>
+                    </a:lnL>
+                    <a:lnR>
+                      <a:noFill/>
+                    </a:lnR>
+                    <a:lnT>
+                      <a:noFill/>
+                    </a:lnT>
+                    <a:lnB>
+                      <a:noFill/>
+                    </a:lnB>
+                  </a:tcPr>
+                </a:tc>
+              </a:tr>
+              <a:tr h="283464">
+                <a:tc>
+                  <a:txBody>
+                    <a:bodyPr wrap="square">
+                      <a:noAutofit/>
+                    </a:bodyPr>
+                    <a:lstStyle/>
+                    <a:p>
+                      <a:pPr algn="l">
+                        <a:lnSpc>
+                          <a:spcPct val="100000"/>
+                        </a:lnSpc>
+                        <a:spcBef>
+                          <a:spcPts val="0"/>
+                        </a:spcBef>
+                        <a:spcAft>
+                          <a:spcPts val="0"/>
+                        </a:spcAft>
+                      </a:pPr>
+                      <a:r>
+                        <a:rPr sz="1300" b="1">
+                          <a:solidFill>
+                            <a:srgbClr val="1F1F1F"/>
+                          </a:solidFill>
+                          <a:latin typeface="Calibri"/>
+                        </a:rPr>
+                        <a:t>Reserva de caixa</a:t>
+                      </a:r>
+                    </a:p>
+                  </a:txBody>
+                  <a:tcPr marL="91440" marR="91440" marT="41148" marB="41148" anchor="ctr">
+                    <a:solidFill>
+                      <a:srgbClr val="FFFFFF"/>
+                    </a:solidFill>
+                    <a:lnL>
+                      <a:noFill/>
+                    </a:lnL>
+                    <a:lnR>
+                      <a:noFill/>
+                    </a:lnR>
+                    <a:lnT>
+                      <a:noFill/>
+                    </a:lnT>
+                    <a:lnB>
+                      <a:noFill/>
+                    </a:lnB>
+                  </a:tcPr>
+                </a:tc>
+                <a:tc>
+                  <a:txBody>
+                    <a:bodyPr wrap="square">
+                      <a:noAutofit/>
+                    </a:bodyPr>
+                    <a:lstStyle/>
                     <a:p>
                       <a:pPr algn="ctr">
                         <a:lnSpc>
@@ -6407,7 +6261,54 @@
                           </a:solidFill>
                           <a:latin typeface="Calibri"/>
                         </a:rPr>
-                        <a:t>documento aplicável</a:t>
+                        <a:t>-</a:t>
+                      </a:r>
+                    </a:p>
+                  </a:txBody>
+                  <a:tcPr marL="91440" marR="91440" marT="41148" marB="41148" anchor="ctr">
+                    <a:solidFill>
+                      <a:srgbClr val="FFFFFF"/>
+                    </a:solidFill>
+                    <a:lnL>
+                      <a:noFill/>
+                    </a:lnL>
+                    <a:lnR>
+                      <a:noFill/>
+                    </a:lnR>
+                    <a:lnT>
+                      <a:noFill/>
+                    </a:lnT>
+                    <a:lnB>
+                      <a:noFill/>
+                    </a:lnB>
+                  </a:tcPr>
+                </a:tc>
+                <a:tc>
+                  <a:txBody>
+                    <a:bodyPr wrap="square">
+                      <a:noAutofit/>
+                    </a:bodyPr>
+                    <a:lstStyle/>
+                    <a:p>
+                      <a:pPr algn="ctr">
+                        <a:lnSpc>
+                          <a:spcPct val="100000"/>
+                        </a:lnSpc>
+                        <a:spcBef>
+                          <a:spcPts val="0"/>
+                        </a:spcBef>
+                        <a:spcAft>
+                          <a:spcPts val="0"/>
+                        </a:spcAft>
+                      </a:pPr>
+                      <a:r>
+                        <a:rPr sz="1300" b="0">
+                          <a:solidFill>
+                            <a:srgbClr val="1F1F1F"/>
+                          </a:solidFill>
+                          <a:latin typeface="Calibri"/>
+                        </a:rPr>
+                        <a:t>-</a:t>
                       </a:r>
                     </a:p>
                   </a:txBody>
@@ -6456,7 +6357,7 @@
                           </a:solidFill>
                           <a:latin typeface="Calibri"/>
                         </a:rPr>
-                        <a:t>Reserva de caixa</a:t>
+                        <a:t>Derivativos/hedge</a:t>
                       </a:r>
                     </a:p>
                   </a:txBody>
@@ -6503,7 +6404,7 @@
                           </a:solidFill>
                           <a:latin typeface="Calibri"/>
                         </a:rPr>
-                        <a:t>Não localizado nas cláusulas revisadas; requer</a:t>
+                        <a:t>Derivativos, ativos no exterior e day trade</a:t>
                       </a:r>
                     </a:p>
                     <a:p>
@@ -6525,7 +6426,7 @@
                           </a:solidFill>
                           <a:latin typeface="Calibri"/>
                         </a:rPr>
-                        <a:t>documento aplicável</a:t>
+                        <a:t>vedados</a:t>
                       </a:r>
                     </a:p>
                   </a:txBody>
@@ -6572,29 +6473,7 @@
                           </a:solidFill>
                           <a:latin typeface="Calibri"/>
                         </a:rPr>
-                        <a:t>Não localizado nas cláusulas revisadas; requer</a:t>
-                      </a:r>
-                    </a:p>
-                    <a:p>
-                      <a:pPr algn="ctr">
-                        <a:lnSpc>
-                          <a:spcPct val="100000"/>
-                        </a:lnSpc>
-                        <a:spcBef>
-                          <a:spcPts val="0"/>
-                        </a:spcBef>
-                        <a:spcAft>
-                          <a:spcPts val="0"/>
-                        </a:spcAft>
-                      </a:pPr>
-                      <a:r>
-                        <a:rPr sz="1300" b="0">
-                          <a:solidFill>
-                            <a:srgbClr val="1F1F1F"/>
-                          </a:solidFill>
-                          <a:latin typeface="Calibri"/>
-                        </a:rPr>
-                        <a:t>documento aplicável</a:t>
+                        <a:t>Derivativos vedados, inclusive hedge</a:t>
                       </a:r>
                     </a:p>
                   </a:txBody>
@@ -6617,172 +6496,7 @@
                   </a:tcPr>
                 </a:tc>
               </a:tr>
-              <a:tr h="470916">
-                <a:tc>
-                  <a:txBody>
-                    <a:bodyPr wrap="square">
-                      <a:noAutofit/>
-                    </a:bodyPr>
-                    <a:lstStyle/>
-                    <a:p>
-                      <a:pPr algn="l">
-                        <a:lnSpc>
-                          <a:spcPct val="100000"/>
-                        </a:lnSpc>
-                        <a:spcBef>
-                          <a:spcPts val="0"/>
-                        </a:spcBef>
-                        <a:spcAft>
-                          <a:spcPts val="0"/>
-                        </a:spcAft>
-                      </a:pPr>
-                      <a:r>
-                        <a:rPr sz="1300" b="1">
-                          <a:solidFill>
-                            <a:srgbClr val="1F1F1F"/>
-                          </a:solidFill>
-                          <a:latin typeface="Calibri"/>
-                        </a:rPr>
-                        <a:t>Derivativos/hedge</a:t>
-                      </a:r>
-                    </a:p>
-                  </a:txBody>
-                  <a:tcPr marL="91440" marR="91440" marT="41148" marB="41148" anchor="ctr">
-                    <a:solidFill>
-                      <a:srgbClr val="FFFFFF"/>
-                    </a:solidFill>
-                    <a:lnL>
-                      <a:noFill/>
-                    </a:lnL>
-                    <a:lnR>
-                      <a:noFill/>
-                    </a:lnR>
-                    <a:lnT>
-                      <a:noFill/>
-                    </a:lnT>
-                    <a:lnB>
-                      <a:noFill/>
-                    </a:lnB>
-                  </a:tcPr>
-                </a:tc>
-                <a:tc>
-                  <a:txBody>
-                    <a:bodyPr wrap="square">
-                      <a:noAutofit/>
-                    </a:bodyPr>
-                    <a:lstStyle/>
-                    <a:p>
-                      <a:pPr algn="ctr">
-                        <a:lnSpc>
-                          <a:spcPct val="100000"/>
-                        </a:lnSpc>
-                        <a:spcBef>
-                          <a:spcPts val="0"/>
-                        </a:spcBef>
-                        <a:spcAft>
-                          <a:spcPts val="0"/>
-                        </a:spcAft>
-                      </a:pPr>
-                      <a:r>
-                        <a:rPr sz="1300" b="0">
-                          <a:solidFill>
-                            <a:srgbClr val="1F1F1F"/>
-                          </a:solidFill>
-                          <a:latin typeface="Calibri"/>
-                        </a:rPr>
-                        <a:t>Derivativos, ativos no exterior e day trade</a:t>
-                      </a:r>
-                    </a:p>
-                    <a:p>
-                      <a:pPr algn="ctr">
-                        <a:lnSpc>
-                          <a:spcPct val="100000"/>
-                        </a:lnSpc>
-                        <a:spcBef>
-                          <a:spcPts val="0"/>
-                        </a:spcBef>
-                        <a:spcAft>
-                          <a:spcPts val="0"/>
-                        </a:spcAft>
-                      </a:pPr>
-                      <a:r>
-                        <a:rPr sz="1300" b="0">
-                          <a:solidFill>
-                            <a:srgbClr val="1F1F1F"/>
-                          </a:solidFill>
-                          <a:latin typeface="Calibri"/>
-                        </a:rPr>
-                        <a:t>vedados</a:t>
-                      </a:r>
-                    </a:p>
-                  </a:txBody>
-                  <a:tcPr marL="91440" marR="91440" marT="41148" marB="41148" anchor="ctr">
-                    <a:solidFill>
-                      <a:srgbClr val="FFFFFF"/>
-                    </a:solidFill>
-                    <a:lnL>
-                      <a:noFill/>
-                    </a:lnL>
-                    <a:lnR>
-                      <a:noFill/>
-                    </a:lnR>
-                    <a:lnT>
-                      <a:noFill/>
-                    </a:lnT>
-                    <a:lnB>
-                      <a:noFill/>
-                    </a:lnB>
-                  </a:tcPr>
-                </a:tc>
-                <a:tc>
-                  <a:txBody>
-                    <a:bodyPr wrap="square">
-                      <a:noAutofit/>
-                    </a:bodyPr>
-                    <a:lstStyle/>
-                    <a:p>
-                      <a:pPr algn="ctr">
-                        <a:lnSpc>
-                          <a:spcPct val="100000"/>
-                        </a:lnSpc>
-                        <a:spcBef>
-                          <a:spcPts val="0"/>
-                        </a:spcBef>
-                        <a:spcAft>
-                          <a:spcPts val="0"/>
-                        </a:spcAft>
-                      </a:pPr>
-                      <a:r>
-                        <a:rPr sz="1300" b="0">
-                          <a:solidFill>
-                            <a:srgbClr val="1F1F1F"/>
-                          </a:solidFill>
-                          <a:latin typeface="Calibri"/>
-                        </a:rPr>
-                        <a:t>Derivativos vedados, inclusive hedge</a:t>
-                      </a:r>
-                    </a:p>
-                  </a:txBody>
-                  <a:tcPr marL="91440" marR="91440" marT="41148" marB="41148" anchor="ctr">
-                    <a:solidFill>
-                      <a:srgbClr val="FFFFFF"/>
-                    </a:solidFill>
-                    <a:lnL>
-                      <a:noFill/>
-                    </a:lnL>
-                    <a:lnR>
-                      <a:noFill/>
-                    </a:lnR>
-                    <a:lnT>
-                      <a:noFill/>
-                    </a:lnT>
-                    <a:lnB>
-                      <a:noFill/>
-                    </a:lnB>
-                  </a:tcPr>
-                </a:tc>
-              </a:tr>
-              <a:tr h="470916">
+              <a:tr h="283464">
                 <a:tc>
                   <a:txBody>
                     <a:bodyPr wrap="square">
@@ -6857,29 +6571,7 @@
                           </a:solidFill>
                           <a:latin typeface="Calibri"/>
                         </a:rPr>
-                        <a:t>Não localizado nas cláusulas revisadas; requer</a:t>
-                      </a:r>
-                    </a:p>
-                    <a:p>
-                      <a:pPr algn="ctr">
-                        <a:lnSpc>
-                          <a:spcPct val="100000"/>
-                        </a:lnSpc>
-                        <a:spcBef>
-                          <a:spcPts val="0"/>
-                        </a:spcBef>
-                        <a:spcAft>
-                          <a:spcPts val="0"/>
-                        </a:spcAft>
-                      </a:pPr>
-                      <a:r>
-                        <a:rPr sz="1300" b="0">
-                          <a:solidFill>
-                            <a:srgbClr val="1F1F1F"/>
-                          </a:solidFill>
-                          <a:latin typeface="Calibri"/>
-                        </a:rPr>
-                        <a:t>documento aplicável</a:t>
+                        <a:t>-</a:t>
                       </a:r>
                     </a:p>
                   </a:txBody>
@@ -6928,29 +6620,7 @@
                           </a:solidFill>
                           <a:latin typeface="Calibri"/>
                         </a:rPr>
-                        <a:t>Não localizado nas cláusulas revisadas; requer</a:t>
-                      </a:r>
-                    </a:p>
-                    <a:p>
-                      <a:pPr algn="ctr">
-                        <a:lnSpc>
-                          <a:spcPct val="100000"/>
-                        </a:lnSpc>
-                        <a:spcBef>
-                          <a:spcPts val="0"/>
-                        </a:spcBef>
-                        <a:spcAft>
-                          <a:spcPts val="0"/>
-                        </a:spcAft>
-                      </a:pPr>
-                      <a:r>
-                        <a:rPr sz="1300" b="0">
-                          <a:solidFill>
-                            <a:srgbClr val="1F1F1F"/>
-                          </a:solidFill>
-                          <a:latin typeface="Calibri"/>
-                        </a:rPr>
-                        <a:t>documento aplicável</a:t>
+                        <a:t>-</a:t>
                       </a:r>
                     </a:p>
                   </a:txBody>
@@ -7120,7 +6790,7 @@
         </p:nvGraphicFramePr>
         <p:xfrm>
           <a:off x="438912" y="932688"/>
-          <a:ext cx="11313870" cy="3218688"/>
+          <a:ext cx="11313870" cy="2468880"/>
         </p:xfrm>
         <a:graphic>
           <a:graphicData uri="http://schemas.openxmlformats.org/drawingml/2006/table">
@@ -7155,7 +6825,7 @@
                       <a:r>
                         <a:rPr sz="1300" b="1">
                           <a:solidFill>
-                            <a:srgbClr val="1F1F1F"/>
+                            <a:srgbClr val="FFFFFF"/>
                           </a:solidFill>
                           <a:latin typeface="Calibri"/>
                         </a:rPr>
@@ -7165,7 +6835,7 @@
                   </a:txBody>
                   <a:tcPr marL="91440" marR="91440" marT="41148" marB="41148" anchor="ctr">
                     <a:solidFill>
-                      <a:srgbClr val="EC7000"/>
+                      <a:srgbClr val="FF6200"/>
                     </a:solidFill>
                     <a:lnL>
                       <a:noFill/>
@@ -7204,7 +6874,7 @@
                       <a:r>
                         <a:rPr sz="1300" b="1">
                           <a:solidFill>
-                            <a:srgbClr val="1F1F1F"/>
+                            <a:srgbClr val="FFFFFF"/>
                           </a:solidFill>
                           <a:latin typeface="Calibri"/>
                         </a:rPr>
@@ -7214,7 +6884,7 @@
                   </a:txBody>
                   <a:tcPr marL="91440" marR="91440" marT="41148" marB="41148" anchor="ctr">
                     <a:solidFill>
-                      <a:srgbClr val="EC7000"/>
+                      <a:srgbClr val="FF6200"/>
                     </a:solidFill>
                     <a:lnL>
                       <a:noFill/>
@@ -7253,7 +6923,7 @@
                       <a:r>
                         <a:rPr sz="1300" b="1">
                           <a:solidFill>
-                            <a:srgbClr val="1F1F1F"/>
+                            <a:srgbClr val="FFFFFF"/>
                           </a:solidFill>
                           <a:latin typeface="Calibri"/>
                         </a:rPr>
@@ -7263,7 +6933,7 @@
                   </a:txBody>
                   <a:tcPr marL="91440" marR="91440" marT="41148" marB="41148" anchor="ctr">
                     <a:solidFill>
-                      <a:srgbClr val="EC7000"/>
+                      <a:srgbClr val="FF6200"/>
                     </a:solidFill>
                     <a:lnL>
                       <a:noFill/>
@@ -7589,29 +7259,7 @@
                           </a:solidFill>
                           <a:latin typeface="Calibri"/>
                         </a:rPr>
-                        <a:t>Não localizado nas cláusulas revisadas; requer</a:t>
-                      </a:r>
-                    </a:p>
-                    <a:p>
-                      <a:pPr algn="ctr">
-                        <a:lnSpc>
-                          <a:spcPct val="100000"/>
-                        </a:lnSpc>
-                        <a:spcBef>
-                          <a:spcPts val="0"/>
-                        </a:spcBef>
-                        <a:spcAft>
-                          <a:spcPts val="0"/>
-                        </a:spcAft>
-                      </a:pPr>
-                      <a:r>
-                        <a:rPr sz="1300" b="0">
-                          <a:solidFill>
-                            <a:srgbClr val="1F1F1F"/>
-                          </a:solidFill>
-                          <a:latin typeface="Calibri"/>
-                        </a:rPr>
-                        <a:t>documento aplicável</a:t>
+                        <a:t>-</a:t>
                       </a:r>
                     </a:p>
                   </a:txBody>
@@ -7634,7 +7282,7 @@
                   </a:tcPr>
                 </a:tc>
               </a:tr>
-              <a:tr h="470916">
+              <a:tr h="283464">
                 <a:tc>
                   <a:txBody>
                     <a:bodyPr wrap="square">
@@ -7754,29 +7402,7 @@
                           </a:solidFill>
                           <a:latin typeface="Calibri"/>
                         </a:rPr>
-                        <a:t>Não localizado nas cláusulas revisadas; requer</a:t>
-                      </a:r>
-                    </a:p>
-                    <a:p>
-                      <a:pPr algn="ctr">
-                        <a:lnSpc>
-                          <a:spcPct val="100000"/>
-                        </a:lnSpc>
-                        <a:spcBef>
-                          <a:spcPts val="0"/>
-                        </a:spcBef>
-                        <a:spcAft>
-                          <a:spcPts val="0"/>
-                        </a:spcAft>
-                      </a:pPr>
-                      <a:r>
-                        <a:rPr sz="1300" b="0">
-                          <a:solidFill>
-                            <a:srgbClr val="1F1F1F"/>
-                          </a:solidFill>
-                          <a:latin typeface="Calibri"/>
-                        </a:rPr>
-                        <a:t>documento aplicável</a:t>
+                        <a:t>-</a:t>
                       </a:r>
                     </a:p>
                   </a:txBody>
@@ -7799,7 +7425,7 @@
                   </a:tcPr>
                 </a:tc>
               </a:tr>
-              <a:tr h="470916">
+              <a:tr h="283464">
                 <a:tc>
                   <a:txBody>
                     <a:bodyPr wrap="square">
@@ -7872,29 +7498,7 @@
                           </a:solidFill>
                           <a:latin typeface="Calibri"/>
                         </a:rPr>
-                        <a:t>Não localizado nas cláusulas revisadas; requer</a:t>
-                      </a:r>
-                    </a:p>
-                    <a:p>
-                      <a:pPr algn="ctr">
-                        <a:lnSpc>
-                          <a:spcPct val="100000"/>
-                        </a:lnSpc>
-                        <a:spcBef>
-                          <a:spcPts val="0"/>
-                        </a:spcBef>
-                        <a:spcAft>
-                          <a:spcPts val="0"/>
-                        </a:spcAft>
-                      </a:pPr>
-                      <a:r>
-                        <a:rPr sz="1300" b="0">
-                          <a:solidFill>
-                            <a:srgbClr val="1F1F1F"/>
-                          </a:solidFill>
-                          <a:latin typeface="Calibri"/>
-                        </a:rPr>
-                        <a:t>documento aplicável</a:t>
+                        <a:t>-</a:t>
                       </a:r>
                     </a:p>
                   </a:txBody>
@@ -7941,29 +7545,7 @@
                           </a:solidFill>
                           <a:latin typeface="Calibri"/>
                         </a:rPr>
-                        <a:t>Não localizado nas cláusulas revisadas; requer</a:t>
-                      </a:r>
-                    </a:p>
-                    <a:p>
-                      <a:pPr algn="ctr">
-                        <a:lnSpc>
-                          <a:spcPct val="100000"/>
-                        </a:lnSpc>
-                        <a:spcBef>
-                          <a:spcPts val="0"/>
-                        </a:spcBef>
-                        <a:spcAft>
-                          <a:spcPts val="0"/>
-                        </a:spcAft>
-                      </a:pPr>
-                      <a:r>
-                        <a:rPr sz="1300" b="0">
-                          <a:solidFill>
-                            <a:srgbClr val="1F1F1F"/>
-                          </a:solidFill>
-                          <a:latin typeface="Calibri"/>
-                        </a:rPr>
-                        <a:t>documento aplicável</a:t>
+                        <a:t>-</a:t>
                       </a:r>
                     </a:p>
                   </a:txBody>
@@ -7986,7 +7568,7 @@
                   </a:tcPr>
                 </a:tc>
               </a:tr>
-              <a:tr h="470916">
+              <a:tr h="283464">
                 <a:tc>
                   <a:txBody>
                     <a:bodyPr wrap="square">
@@ -8059,29 +7641,7 @@
                           </a:solidFill>
                           <a:latin typeface="Calibri"/>
                         </a:rPr>
-                        <a:t>Não localizado nas cláusulas revisadas; requer</a:t>
-                      </a:r>
-                    </a:p>
-                    <a:p>
-                      <a:pPr algn="ctr">
-                        <a:lnSpc>
-                          <a:spcPct val="100000"/>
-                        </a:lnSpc>
-                        <a:spcBef>
-                          <a:spcPts val="0"/>
-                        </a:spcBef>
-                        <a:spcAft>
-                          <a:spcPts val="0"/>
-                        </a:spcAft>
-                      </a:pPr>
-                      <a:r>
-                        <a:rPr sz="1300" b="0">
-                          <a:solidFill>
-                            <a:srgbClr val="1F1F1F"/>
-                          </a:solidFill>
-                          <a:latin typeface="Calibri"/>
-                        </a:rPr>
-                        <a:t>documento aplicável</a:t>
+                        <a:t>-</a:t>
                       </a:r>
                     </a:p>
                   </a:txBody>
@@ -8128,29 +7688,7 @@
                           </a:solidFill>
                           <a:latin typeface="Calibri"/>
                         </a:rPr>
-                        <a:t>Não localizado nas cláusulas revisadas; requer</a:t>
-                      </a:r>
-                    </a:p>
-                    <a:p>
-                      <a:pPr algn="ctr">
-                        <a:lnSpc>
-                          <a:spcPct val="100000"/>
-                        </a:lnSpc>
-                        <a:spcBef>
-                          <a:spcPts val="0"/>
-                        </a:spcBef>
-                        <a:spcAft>
-                          <a:spcPts val="0"/>
-                        </a:spcAft>
-                      </a:pPr>
-                      <a:r>
-                        <a:rPr sz="1300" b="0">
-                          <a:solidFill>
-                            <a:srgbClr val="1F1F1F"/>
-                          </a:solidFill>
-                          <a:latin typeface="Calibri"/>
-                        </a:rPr>
-                        <a:t>documento aplicável</a:t>
+                        <a:t>-</a:t>
                       </a:r>
                     </a:p>
                   </a:txBody>
@@ -8173,7 +7711,7 @@
                   </a:tcPr>
                 </a:tc>
               </a:tr>
-              <a:tr h="470916">
+              <a:tr h="283464">
                 <a:tc>
                   <a:txBody>
                     <a:bodyPr wrap="square">
@@ -8248,29 +7786,7 @@
                           </a:solidFill>
                           <a:latin typeface="Calibri"/>
                         </a:rPr>
-                        <a:t>Não localizado nas cláusulas revisadas; requer</a:t>
-                      </a:r>
-                    </a:p>
-                    <a:p>
-                      <a:pPr algn="ctr">
-                        <a:lnSpc>
-                          <a:spcPct val="100000"/>
-                        </a:lnSpc>
-                        <a:spcBef>
-                          <a:spcPts val="0"/>
-                        </a:spcBef>
-                        <a:spcAft>
-                          <a:spcPts val="0"/>
-                        </a:spcAft>
-                      </a:pPr>
-                      <a:r>
-                        <a:rPr sz="1300" b="0">
-                          <a:solidFill>
-                            <a:srgbClr val="1F1F1F"/>
-                          </a:solidFill>
-                          <a:latin typeface="Calibri"/>
-                        </a:rPr>
-                        <a:t>documento aplicável</a:t>
+                        <a:t>-</a:t>
                       </a:r>
                     </a:p>
                   </a:txBody>
@@ -8319,29 +7835,7 @@
                           </a:solidFill>
                           <a:latin typeface="Calibri"/>
                         </a:rPr>
-                        <a:t>Não localizado nas cláusulas revisadas; requer</a:t>
-                      </a:r>
-                    </a:p>
-                    <a:p>
-                      <a:pPr algn="ctr">
-                        <a:lnSpc>
-                          <a:spcPct val="100000"/>
-                        </a:lnSpc>
-                        <a:spcBef>
-                          <a:spcPts val="0"/>
-                        </a:spcBef>
-                        <a:spcAft>
-                          <a:spcPts val="0"/>
-                        </a:spcAft>
-                      </a:pPr>
-                      <a:r>
-                        <a:rPr sz="1300" b="0">
-                          <a:solidFill>
-                            <a:srgbClr val="1F1F1F"/>
-                          </a:solidFill>
-                          <a:latin typeface="Calibri"/>
-                        </a:rPr>
-                        <a:t>documento aplicável</a:t>
+                        <a:t>-</a:t>
                       </a:r>
                     </a:p>
                   </a:txBody>
@@ -8511,7 +8005,7 @@
         </p:nvGraphicFramePr>
         <p:xfrm>
           <a:off x="438912" y="932688"/>
-          <a:ext cx="11313870" cy="2276856"/>
+          <a:ext cx="11313870" cy="1714500"/>
         </p:xfrm>
         <a:graphic>
           <a:graphicData uri="http://schemas.openxmlformats.org/drawingml/2006/table">
@@ -8546,7 +8040,7 @@
                       <a:r>
                         <a:rPr sz="1300" b="1">
                           <a:solidFill>
-                            <a:srgbClr val="1F1F1F"/>
+                            <a:srgbClr val="FFFFFF"/>
                           </a:solidFill>
                           <a:latin typeface="Calibri"/>
                         </a:rPr>
@@ -8556,7 +8050,7 @@
                   </a:txBody>
                   <a:tcPr marL="91440" marR="91440" marT="41148" marB="41148" anchor="ctr">
                     <a:solidFill>
-                      <a:srgbClr val="EC7000"/>
+                      <a:srgbClr val="FF6200"/>
                     </a:solidFill>
                     <a:lnL>
                       <a:noFill/>
@@ -8595,7 +8089,7 @@
                       <a:r>
                         <a:rPr sz="1300" b="1">
                           <a:solidFill>
-                            <a:srgbClr val="1F1F1F"/>
+                            <a:srgbClr val="FFFFFF"/>
                           </a:solidFill>
                           <a:latin typeface="Calibri"/>
                         </a:rPr>
@@ -8605,7 +8099,7 @@
                   </a:txBody>
                   <a:tcPr marL="91440" marR="91440" marT="41148" marB="41148" anchor="ctr">
                     <a:solidFill>
-                      <a:srgbClr val="EC7000"/>
+                      <a:srgbClr val="FF6200"/>
                     </a:solidFill>
                     <a:lnL>
                       <a:noFill/>
@@ -8644,7 +8138,7 @@
                       <a:r>
                         <a:rPr sz="1300" b="1">
                           <a:solidFill>
-                            <a:srgbClr val="1F1F1F"/>
+                            <a:srgbClr val="FFFFFF"/>
                           </a:solidFill>
                           <a:latin typeface="Calibri"/>
                         </a:rPr>
@@ -8654,7 +8148,7 @@
                   </a:txBody>
                   <a:tcPr marL="91440" marR="91440" marT="41148" marB="41148" anchor="ctr">
                     <a:solidFill>
-                      <a:srgbClr val="EC7000"/>
+                      <a:srgbClr val="FF6200"/>
                     </a:solidFill>
                     <a:lnL>
                       <a:noFill/>
@@ -8669,6 +8163,149 @@
                       <a:solidFill>
                         <a:srgbClr val="D9DEE5"/>
                       </a:solidFill>
+                    </a:lnB>
+                  </a:tcPr>
+                </a:tc>
+              </a:tr>
+              <a:tr h="283464">
+                <a:tc>
+                  <a:txBody>
+                    <a:bodyPr wrap="square">
+                      <a:noAutofit/>
+                    </a:bodyPr>
+                    <a:lstStyle/>
+                    <a:p>
+                      <a:pPr algn="l">
+                        <a:lnSpc>
+                          <a:spcPct val="100000"/>
+                        </a:lnSpc>
+                        <a:spcBef>
+                          <a:spcPts val="0"/>
+                        </a:spcBef>
+                        <a:spcAft>
+                          <a:spcPts val="0"/>
+                        </a:spcAft>
+                      </a:pPr>
+                      <a:r>
+                        <a:rPr sz="1300" b="1">
+                          <a:solidFill>
+                            <a:srgbClr val="1F1F1F"/>
+                          </a:solidFill>
+                          <a:latin typeface="Calibri"/>
+                        </a:rPr>
+                        <a:t>Classes/séries</a:t>
+                      </a:r>
+                    </a:p>
+                  </a:txBody>
+                  <a:tcPr marL="91440" marR="91440" marT="41148" marB="41148" anchor="ctr">
+                    <a:solidFill>
+                      <a:srgbClr val="FFFFFF"/>
+                    </a:solidFill>
+                    <a:lnL>
+                      <a:noFill/>
+                    </a:lnL>
+                    <a:lnR>
+                      <a:noFill/>
+                    </a:lnR>
+                    <a:lnT>
+                      <a:noFill/>
+                    </a:lnT>
+                    <a:lnB>
+                      <a:noFill/>
+                    </a:lnB>
+                  </a:tcPr>
+                </a:tc>
+                <a:tc>
+                  <a:txBody>
+                    <a:bodyPr wrap="square">
+                      <a:noAutofit/>
+                    </a:bodyPr>
+                    <a:lstStyle/>
+                    <a:p>
+                      <a:pPr algn="ctr">
+                        <a:lnSpc>
+                          <a:spcPct val="100000"/>
+                        </a:lnSpc>
+                        <a:spcBef>
+                          <a:spcPts val="0"/>
+                        </a:spcBef>
+                        <a:spcAft>
+                          <a:spcPts val="0"/>
+                        </a:spcAft>
+                      </a:pPr>
+                      <a:r>
+                        <a:rPr sz="1300" b="0">
+                          <a:solidFill>
+                            <a:srgbClr val="1F1F1F"/>
+                          </a:solidFill>
+                          <a:latin typeface="Calibri"/>
+                        </a:rPr>
+                        <a:t>Sênior, mezanino e júnior</a:t>
+                      </a:r>
+                    </a:p>
+                  </a:txBody>
+                  <a:tcPr marL="91440" marR="91440" marT="41148" marB="41148" anchor="ctr">
+                    <a:solidFill>
+                      <a:srgbClr val="FFFFFF"/>
+                    </a:solidFill>
+                    <a:lnL>
+                      <a:noFill/>
+                    </a:lnL>
+                    <a:lnR>
+                      <a:noFill/>
+                    </a:lnR>
+                    <a:lnT>
+                      <a:noFill/>
+                    </a:lnT>
+                    <a:lnB>
+                      <a:noFill/>
+                    </a:lnB>
+                  </a:tcPr>
+                </a:tc>
+                <a:tc>
+                  <a:txBody>
+                    <a:bodyPr wrap="square">
+                      <a:noAutofit/>
+                    </a:bodyPr>
+                    <a:lstStyle/>
+                    <a:p>
+                      <a:pPr algn="ctr">
+                        <a:lnSpc>
+                          <a:spcPct val="100000"/>
+                        </a:lnSpc>
+                        <a:spcBef>
+                          <a:spcPts val="0"/>
+                        </a:spcBef>
+                        <a:spcAft>
+                          <a:spcPts val="0"/>
+                        </a:spcAft>
+                      </a:pPr>
+                      <a:r>
+                        <a:rPr sz="1300" b="0">
+                          <a:solidFill>
+                            <a:srgbClr val="1F1F1F"/>
+                          </a:solidFill>
+                          <a:latin typeface="Calibri"/>
+                        </a:rPr>
+                        <a:t>-</a:t>
+                      </a:r>
+                    </a:p>
+                  </a:txBody>
+                  <a:tcPr marL="91440" marR="91440" marT="41148" marB="41148" anchor="ctr">
+                    <a:solidFill>
+                      <a:srgbClr val="FFFFFF"/>
+                    </a:solidFill>
+                    <a:lnL>
+                      <a:noFill/>
+                    </a:lnL>
+                    <a:lnR>
+                      <a:noFill/>
+                    </a:lnR>
+                    <a:lnT>
+                      <a:noFill/>
+                    </a:lnT>
+                    <a:lnB>
+                      <a:noFill/>
                     </a:lnB>
                   </a:tcPr>
                 </a:tc>
@@ -8699,7 +8336,7 @@
                           </a:solidFill>
                           <a:latin typeface="Calibri"/>
                         </a:rPr>
-                        <a:t>Classes/séries</a:t>
+                        <a:t>Remuneração</a:t>
                       </a:r>
                     </a:p>
                   </a:txBody>
@@ -8746,7 +8383,29 @@
                           </a:solidFill>
                           <a:latin typeface="Calibri"/>
                         </a:rPr>
-                        <a:t>Sênior, mezanino e júnior</a:t>
+                        <a:t>Sênior CDI +2,50%; mezanino CDI +3,50% nos</a:t>
+                      </a:r>
+                    </a:p>
+                    <a:p>
+                      <a:pPr algn="ctr">
+                        <a:lnSpc>
+                          <a:spcPct val="100000"/>
+                        </a:lnSpc>
+                        <a:spcBef>
+                          <a:spcPts val="0"/>
+                        </a:spcBef>
+                        <a:spcAft>
+                          <a:spcPts val="0"/>
+                        </a:spcAft>
+                      </a:pPr>
+                      <a:r>
+                        <a:rPr sz="1300" b="0">
+                          <a:solidFill>
+                            <a:srgbClr val="1F1F1F"/>
+                          </a:solidFill>
+                          <a:latin typeface="Calibri"/>
+                        </a:rPr>
+                        <a:t>apêndices</a:t>
                       </a:r>
                     </a:p>
                   </a:txBody>
@@ -8793,29 +8452,7 @@
                           </a:solidFill>
                           <a:latin typeface="Calibri"/>
                         </a:rPr>
-                        <a:t>Não localizado nas cláusulas revisadas; requer</a:t>
-                      </a:r>
-                    </a:p>
-                    <a:p>
-                      <a:pPr algn="ctr">
-                        <a:lnSpc>
-                          <a:spcPct val="100000"/>
-                        </a:lnSpc>
-                        <a:spcBef>
-                          <a:spcPts val="0"/>
-                        </a:spcBef>
-                        <a:spcAft>
-                          <a:spcPts val="0"/>
-                        </a:spcAft>
-                      </a:pPr>
-                      <a:r>
-                        <a:rPr sz="1300" b="0">
-                          <a:solidFill>
-                            <a:srgbClr val="1F1F1F"/>
-                          </a:solidFill>
-                          <a:latin typeface="Calibri"/>
-                        </a:rPr>
-                        <a:t>documento aplicável</a:t>
+                        <a:t>-</a:t>
                       </a:r>
                     </a:p>
                   </a:txBody>
@@ -8838,7 +8475,7 @@
                   </a:tcPr>
                 </a:tc>
               </a:tr>
-              <a:tr h="470916">
+              <a:tr h="283464">
                 <a:tc>
                   <a:txBody>
                     <a:bodyPr wrap="square">
@@ -8864,7 +8501,7 @@
                           </a:solidFill>
                           <a:latin typeface="Calibri"/>
                         </a:rPr>
-                        <a:t>Remuneração</a:t>
+                        <a:t>Volume/VNU</a:t>
                       </a:r>
                     </a:p>
                   </a:txBody>
@@ -8911,29 +8548,7 @@
                           </a:solidFill>
                           <a:latin typeface="Calibri"/>
                         </a:rPr>
-                        <a:t>Sênior CDI +2,50%; mezanino CDI +3,50% nos</a:t>
-                      </a:r>
-                    </a:p>
-                    <a:p>
-                      <a:pPr algn="ctr">
-                        <a:lnSpc>
-                          <a:spcPct val="100000"/>
-                        </a:lnSpc>
-                        <a:spcBef>
-                          <a:spcPts val="0"/>
-                        </a:spcBef>
-                        <a:spcAft>
-                          <a:spcPts val="0"/>
-                        </a:spcAft>
-                      </a:pPr>
-                      <a:r>
-                        <a:rPr sz="1300" b="0">
-                          <a:solidFill>
-                            <a:srgbClr val="1F1F1F"/>
-                          </a:solidFill>
-                          <a:latin typeface="Calibri"/>
-                        </a:rPr>
-                        <a:t>apêndices</a:t>
+                        <a:t>-</a:t>
                       </a:r>
                     </a:p>
                   </a:txBody>
@@ -8980,29 +8595,7 @@
                           </a:solidFill>
                           <a:latin typeface="Calibri"/>
                         </a:rPr>
-                        <a:t>Spread final não localizado nas cláusulas</a:t>
-                      </a:r>
-                    </a:p>
-                    <a:p>
-                      <a:pPr algn="ctr">
-                        <a:lnSpc>
-                          <a:spcPct val="100000"/>
-                        </a:lnSpc>
-                        <a:spcBef>
-                          <a:spcPts val="0"/>
-                        </a:spcBef>
-                        <a:spcAft>
-                          <a:spcPts val="0"/>
-                        </a:spcAft>
-                      </a:pPr>
-                      <a:r>
-                        <a:rPr sz="1300" b="0">
-                          <a:solidFill>
-                            <a:srgbClr val="1F1F1F"/>
-                          </a:solidFill>
-                          <a:latin typeface="Calibri"/>
-                        </a:rPr>
-                        <a:t>revisadas; requer suplemento ou ato específico</a:t>
+                        <a:t>-</a:t>
                       </a:r>
                     </a:p>
                   </a:txBody>
@@ -9025,194 +8618,7 @@
                   </a:tcPr>
                 </a:tc>
               </a:tr>
-              <a:tr h="470916">
-                <a:tc>
-                  <a:txBody>
-                    <a:bodyPr wrap="square">
-                      <a:noAutofit/>
-                    </a:bodyPr>
-                    <a:lstStyle/>
-                    <a:p>
-                      <a:pPr algn="l">
-                        <a:lnSpc>
-                          <a:spcPct val="100000"/>
-                        </a:lnSpc>
-                        <a:spcBef>
-                          <a:spcPts val="0"/>
-                        </a:spcBef>
-                        <a:spcAft>
-                          <a:spcPts val="0"/>
-                        </a:spcAft>
-                      </a:pPr>
-                      <a:r>
-                        <a:rPr sz="1300" b="1">
-                          <a:solidFill>
-                            <a:srgbClr val="1F1F1F"/>
-                          </a:solidFill>
-                          <a:latin typeface="Calibri"/>
-                        </a:rPr>
-                        <a:t>Volume/VNU</a:t>
-                      </a:r>
-                    </a:p>
-                  </a:txBody>
-                  <a:tcPr marL="91440" marR="91440" marT="41148" marB="41148" anchor="ctr">
-                    <a:solidFill>
-                      <a:srgbClr val="FFFFFF"/>
-                    </a:solidFill>
-                    <a:lnL>
-                      <a:noFill/>
-                    </a:lnL>
-                    <a:lnR>
-                      <a:noFill/>
-                    </a:lnR>
-                    <a:lnT>
-                      <a:noFill/>
-                    </a:lnT>
-                    <a:lnB>
-                      <a:noFill/>
-                    </a:lnB>
-                  </a:tcPr>
-                </a:tc>
-                <a:tc>
-                  <a:txBody>
-                    <a:bodyPr wrap="square">
-                      <a:noAutofit/>
-                    </a:bodyPr>
-                    <a:lstStyle/>
-                    <a:p>
-                      <a:pPr algn="ctr">
-                        <a:lnSpc>
-                          <a:spcPct val="100000"/>
-                        </a:lnSpc>
-                        <a:spcBef>
-                          <a:spcPts val="0"/>
-                        </a:spcBef>
-                        <a:spcAft>
-                          <a:spcPts val="0"/>
-                        </a:spcAft>
-                      </a:pPr>
-                      <a:r>
-                        <a:rPr sz="1300" b="0">
-                          <a:solidFill>
-                            <a:srgbClr val="1F1F1F"/>
-                          </a:solidFill>
-                          <a:latin typeface="Calibri"/>
-                        </a:rPr>
-                        <a:t>Não localizado nas cláusulas revisadas; requer</a:t>
-                      </a:r>
-                    </a:p>
-                    <a:p>
-                      <a:pPr algn="ctr">
-                        <a:lnSpc>
-                          <a:spcPct val="100000"/>
-                        </a:lnSpc>
-                        <a:spcBef>
-                          <a:spcPts val="0"/>
-                        </a:spcBef>
-                        <a:spcAft>
-                          <a:spcPts val="0"/>
-                        </a:spcAft>
-                      </a:pPr>
-                      <a:r>
-                        <a:rPr sz="1300" b="0">
-                          <a:solidFill>
-                            <a:srgbClr val="1F1F1F"/>
-                          </a:solidFill>
-                          <a:latin typeface="Calibri"/>
-                        </a:rPr>
-                        <a:t>documento aplicável</a:t>
-                      </a:r>
-                    </a:p>
-                  </a:txBody>
-                  <a:tcPr marL="91440" marR="91440" marT="41148" marB="41148" anchor="ctr">
-                    <a:solidFill>
-                      <a:srgbClr val="FFFFFF"/>
-                    </a:solidFill>
-                    <a:lnL>
-                      <a:noFill/>
-                    </a:lnL>
-                    <a:lnR>
-                      <a:noFill/>
-                    </a:lnR>
-                    <a:lnT>
-                      <a:noFill/>
-                    </a:lnT>
-                    <a:lnB>
-                      <a:noFill/>
-                    </a:lnB>
-                  </a:tcPr>
-                </a:tc>
-                <a:tc>
-                  <a:txBody>
-                    <a:bodyPr wrap="square">
-                      <a:noAutofit/>
-                    </a:bodyPr>
-                    <a:lstStyle/>
-                    <a:p>
-                      <a:pPr algn="ctr">
-                        <a:lnSpc>
-                          <a:spcPct val="100000"/>
-                        </a:lnSpc>
-                        <a:spcBef>
-                          <a:spcPts val="0"/>
-                        </a:spcBef>
-                        <a:spcAft>
-                          <a:spcPts val="0"/>
-                        </a:spcAft>
-                      </a:pPr>
-                      <a:r>
-                        <a:rPr sz="1300" b="0">
-                          <a:solidFill>
-                            <a:srgbClr val="1F1F1F"/>
-                          </a:solidFill>
-                          <a:latin typeface="Calibri"/>
-                        </a:rPr>
-                        <a:t>Não localizado nas cláusulas revisadas; requer</a:t>
-                      </a:r>
-                    </a:p>
-                    <a:p>
-                      <a:pPr algn="ctr">
-                        <a:lnSpc>
-                          <a:spcPct val="100000"/>
-                        </a:lnSpc>
-                        <a:spcBef>
-                          <a:spcPts val="0"/>
-                        </a:spcBef>
-                        <a:spcAft>
-                          <a:spcPts val="0"/>
-                        </a:spcAft>
-                      </a:pPr>
-                      <a:r>
-                        <a:rPr sz="1300" b="0">
-                          <a:solidFill>
-                            <a:srgbClr val="1F1F1F"/>
-                          </a:solidFill>
-                          <a:latin typeface="Calibri"/>
-                        </a:rPr>
-                        <a:t>documento aplicável</a:t>
-                      </a:r>
-                    </a:p>
-                  </a:txBody>
-                  <a:tcPr marL="91440" marR="91440" marT="41148" marB="41148" anchor="ctr">
-                    <a:solidFill>
-                      <a:srgbClr val="FFFFFF"/>
-                    </a:solidFill>
-                    <a:lnL>
-                      <a:noFill/>
-                    </a:lnL>
-                    <a:lnR>
-                      <a:noFill/>
-                    </a:lnR>
-                    <a:lnT>
-                      <a:noFill/>
-                    </a:lnT>
-                    <a:lnB>
-                      <a:noFill/>
-                    </a:lnB>
-                  </a:tcPr>
-                </a:tc>
-              </a:tr>
-              <a:tr h="470916">
+              <a:tr h="283464">
                 <a:tc>
                   <a:txBody>
                     <a:bodyPr wrap="square">
@@ -9287,29 +8693,7 @@
                           </a:solidFill>
                           <a:latin typeface="Calibri"/>
                         </a:rPr>
-                        <a:t>Não localizado nas cláusulas revisadas; requer</a:t>
-                      </a:r>
-                    </a:p>
-                    <a:p>
-                      <a:pPr algn="ctr">
-                        <a:lnSpc>
-                          <a:spcPct val="100000"/>
-                        </a:lnSpc>
-                        <a:spcBef>
-                          <a:spcPts val="0"/>
-                        </a:spcBef>
-                        <a:spcAft>
-                          <a:spcPts val="0"/>
-                        </a:spcAft>
-                      </a:pPr>
-                      <a:r>
-                        <a:rPr sz="1300" b="0">
-                          <a:solidFill>
-                            <a:srgbClr val="1F1F1F"/>
-                          </a:solidFill>
-                          <a:latin typeface="Calibri"/>
-                        </a:rPr>
-                        <a:t>documento aplicável</a:t>
+                        <a:t>-</a:t>
                       </a:r>
                     </a:p>
                   </a:txBody>
@@ -9358,29 +8742,7 @@
                           </a:solidFill>
                           <a:latin typeface="Calibri"/>
                         </a:rPr>
-                        <a:t>Não localizado nas cláusulas revisadas; requer</a:t>
-                      </a:r>
-                    </a:p>
-                    <a:p>
-                      <a:pPr algn="ctr">
-                        <a:lnSpc>
-                          <a:spcPct val="100000"/>
-                        </a:lnSpc>
-                        <a:spcBef>
-                          <a:spcPts val="0"/>
-                        </a:spcBef>
-                        <a:spcAft>
-                          <a:spcPts val="0"/>
-                        </a:spcAft>
-                      </a:pPr>
-                      <a:r>
-                        <a:rPr sz="1300" b="0">
-                          <a:solidFill>
-                            <a:srgbClr val="1F1F1F"/>
-                          </a:solidFill>
-                          <a:latin typeface="Calibri"/>
-                        </a:rPr>
-                        <a:t>documento aplicável</a:t>
+                        <a:t>-</a:t>
                       </a:r>
                     </a:p>
                   </a:txBody>
@@ -9550,7 +8912,7 @@
         </p:nvGraphicFramePr>
         <p:xfrm>
           <a:off x="438912" y="932688"/>
-          <a:ext cx="11313870" cy="1993392"/>
+          <a:ext cx="11313870" cy="1805940"/>
         </p:xfrm>
         <a:graphic>
           <a:graphicData uri="http://schemas.openxmlformats.org/drawingml/2006/table">
@@ -9585,7 +8947,7 @@
                       <a:r>
                         <a:rPr sz="1300" b="1">
                           <a:solidFill>
-                            <a:srgbClr val="1F1F1F"/>
+                            <a:srgbClr val="FFFFFF"/>
                           </a:solidFill>
                           <a:latin typeface="Calibri"/>
                         </a:rPr>
@@ -9595,7 +8957,7 @@
                   </a:txBody>
                   <a:tcPr marL="91440" marR="91440" marT="41148" marB="41148" anchor="ctr">
                     <a:solidFill>
-                      <a:srgbClr val="EC7000"/>
+                      <a:srgbClr val="FF6200"/>
                     </a:solidFill>
                     <a:lnL>
                       <a:noFill/>
@@ -9634,7 +8996,7 @@
                       <a:r>
                         <a:rPr sz="1300" b="1">
                           <a:solidFill>
-                            <a:srgbClr val="1F1F1F"/>
+                            <a:srgbClr val="FFFFFF"/>
                           </a:solidFill>
                           <a:latin typeface="Calibri"/>
                         </a:rPr>
@@ -9644,7 +9006,7 @@
                   </a:txBody>
                   <a:tcPr marL="91440" marR="91440" marT="41148" marB="41148" anchor="ctr">
                     <a:solidFill>
-                      <a:srgbClr val="EC7000"/>
+                      <a:srgbClr val="FF6200"/>
                     </a:solidFill>
                     <a:lnL>
                       <a:noFill/>
@@ -9683,7 +9045,7 @@
                       <a:r>
                         <a:rPr sz="1300" b="1">
                           <a:solidFill>
-                            <a:srgbClr val="1F1F1F"/>
+                            <a:srgbClr val="FFFFFF"/>
                           </a:solidFill>
                           <a:latin typeface="Calibri"/>
                         </a:rPr>
@@ -9693,7 +9055,7 @@
                   </a:txBody>
                   <a:tcPr marL="91440" marR="91440" marT="41148" marB="41148" anchor="ctr">
                     <a:solidFill>
-                      <a:srgbClr val="EC7000"/>
+                      <a:srgbClr val="FF6200"/>
                     </a:solidFill>
                     <a:lnL>
                       <a:noFill/>
@@ -9854,29 +9216,7 @@
                           </a:solidFill>
                           <a:latin typeface="Calibri"/>
                         </a:rPr>
-                        <a:t>Não localizado nas cláusulas revisadas; requer</a:t>
-                      </a:r>
-                    </a:p>
-                    <a:p>
-                      <a:pPr algn="ctr">
-                        <a:lnSpc>
-                          <a:spcPct val="100000"/>
-                        </a:lnSpc>
-                        <a:spcBef>
-                          <a:spcPts val="0"/>
-                        </a:spcBef>
-                        <a:spcAft>
-                          <a:spcPts val="0"/>
-                        </a:spcAft>
-                      </a:pPr>
-                      <a:r>
-                        <a:rPr sz="1300" b="0">
-                          <a:solidFill>
-                            <a:srgbClr val="1F1F1F"/>
-                          </a:solidFill>
-                          <a:latin typeface="Calibri"/>
-                        </a:rPr>
-                        <a:t>documento aplicável</a:t>
+                        <a:t>-</a:t>
                       </a:r>
                     </a:p>
                   </a:txBody>
@@ -10063,29 +9403,7 @@
                           </a:solidFill>
                           <a:latin typeface="Calibri"/>
                         </a:rPr>
-                        <a:t>Não localizado nas cláusulas revisadas; requer</a:t>
-                      </a:r>
-                    </a:p>
-                    <a:p>
-                      <a:pPr algn="ctr">
-                        <a:lnSpc>
-                          <a:spcPct val="100000"/>
-                        </a:lnSpc>
-                        <a:spcBef>
-                          <a:spcPts val="0"/>
-                        </a:spcBef>
-                        <a:spcAft>
-                          <a:spcPts val="0"/>
-                        </a:spcAft>
-                      </a:pPr>
-                      <a:r>
-                        <a:rPr sz="1300" b="0">
-                          <a:solidFill>
-                            <a:srgbClr val="1F1F1F"/>
-                          </a:solidFill>
-                          <a:latin typeface="Calibri"/>
-                        </a:rPr>
-                        <a:t>documento aplicável</a:t>
+                        <a:t>-</a:t>
                       </a:r>
                     </a:p>
                   </a:txBody>
@@ -10108,7 +9426,7 @@
                   </a:tcPr>
                 </a:tc>
               </a:tr>
-              <a:tr h="470916">
+              <a:tr h="283464">
                 <a:tc>
                   <a:txBody>
                     <a:bodyPr wrap="square">
@@ -10183,29 +9501,7 @@
                           </a:solidFill>
                           <a:latin typeface="Calibri"/>
                         </a:rPr>
-                        <a:t>Não localizado nas cláusulas revisadas; requer</a:t>
-                      </a:r>
-                    </a:p>
-                    <a:p>
-                      <a:pPr algn="ctr">
-                        <a:lnSpc>
-                          <a:spcPct val="100000"/>
-                        </a:lnSpc>
-                        <a:spcBef>
-                          <a:spcPts val="0"/>
-                        </a:spcBef>
-                        <a:spcAft>
-                          <a:spcPts val="0"/>
-                        </a:spcAft>
-                      </a:pPr>
-                      <a:r>
-                        <a:rPr sz="1300" b="0">
-                          <a:solidFill>
-                            <a:srgbClr val="1F1F1F"/>
-                          </a:solidFill>
-                          <a:latin typeface="Calibri"/>
-                        </a:rPr>
-                        <a:t>documento aplicável</a:t>
+                        <a:t>-</a:t>
                       </a:r>
                     </a:p>
                   </a:txBody>
@@ -10254,29 +9550,7 @@
                           </a:solidFill>
                           <a:latin typeface="Calibri"/>
                         </a:rPr>
-                        <a:t>Não localizado nas cláusulas revisadas; requer</a:t>
-                      </a:r>
-                    </a:p>
-                    <a:p>
-                      <a:pPr algn="ctr">
-                        <a:lnSpc>
-                          <a:spcPct val="100000"/>
-                        </a:lnSpc>
-                        <a:spcBef>
-                          <a:spcPts val="0"/>
-                        </a:spcBef>
-                        <a:spcAft>
-                          <a:spcPts val="0"/>
-                        </a:spcAft>
-                      </a:pPr>
-                      <a:r>
-                        <a:rPr sz="1300" b="0">
-                          <a:solidFill>
-                            <a:srgbClr val="1F1F1F"/>
-                          </a:solidFill>
-                          <a:latin typeface="Calibri"/>
-                        </a:rPr>
-                        <a:t>documento aplicável</a:t>
+                        <a:t>-</a:t>
                       </a:r>
                     </a:p>
                   </a:txBody>
@@ -10446,7 +9720,7 @@
         </p:nvGraphicFramePr>
         <p:xfrm>
           <a:off x="438912" y="932688"/>
-          <a:ext cx="11313870" cy="1805940"/>
+          <a:ext cx="11313870" cy="1243584"/>
         </p:xfrm>
         <a:graphic>
           <a:graphicData uri="http://schemas.openxmlformats.org/drawingml/2006/table">
@@ -10481,7 +9755,7 @@
                       <a:r>
                         <a:rPr sz="1300" b="1">
                           <a:solidFill>
-                            <a:srgbClr val="1F1F1F"/>
+                            <a:srgbClr val="FFFFFF"/>
                           </a:solidFill>
                           <a:latin typeface="Calibri"/>
                         </a:rPr>
@@ -10491,7 +9765,7 @@
                   </a:txBody>
                   <a:tcPr marL="91440" marR="91440" marT="41148" marB="41148" anchor="ctr">
                     <a:solidFill>
-                      <a:srgbClr val="EC7000"/>
+                      <a:srgbClr val="FF6200"/>
                     </a:solidFill>
                     <a:lnL>
                       <a:noFill/>
@@ -10530,7 +9804,7 @@
                       <a:r>
                         <a:rPr sz="1300" b="1">
                           <a:solidFill>
-                            <a:srgbClr val="1F1F1F"/>
+                            <a:srgbClr val="FFFFFF"/>
                           </a:solidFill>
                           <a:latin typeface="Calibri"/>
                         </a:rPr>
@@ -10540,7 +9814,7 @@
                   </a:txBody>
                   <a:tcPr marL="91440" marR="91440" marT="41148" marB="41148" anchor="ctr">
                     <a:solidFill>
-                      <a:srgbClr val="EC7000"/>
+                      <a:srgbClr val="FF6200"/>
                     </a:solidFill>
                     <a:lnL>
                       <a:noFill/>
@@ -10579,7 +9853,7 @@
                       <a:r>
                         <a:rPr sz="1300" b="1">
                           <a:solidFill>
-                            <a:srgbClr val="1F1F1F"/>
+                            <a:srgbClr val="FFFFFF"/>
                           </a:solidFill>
                           <a:latin typeface="Calibri"/>
                         </a:rPr>
@@ -10589,7 +9863,7 @@
                   </a:txBody>
                   <a:tcPr marL="91440" marR="91440" marT="41148" marB="41148" anchor="ctr">
                     <a:solidFill>
-                      <a:srgbClr val="EC7000"/>
+                      <a:srgbClr val="FF6200"/>
                     </a:solidFill>
                     <a:lnL>
                       <a:noFill/>
@@ -10608,7 +9882,7 @@
                   </a:tcPr>
                 </a:tc>
               </a:tr>
-              <a:tr h="470916">
+              <a:tr h="283464">
                 <a:tc>
                   <a:txBody>
                     <a:bodyPr wrap="square">
@@ -10681,29 +9955,7 @@
                           </a:solidFill>
                           <a:latin typeface="Calibri"/>
                         </a:rPr>
-                        <a:t>Não localizado nas cláusulas revisadas; requer</a:t>
-                      </a:r>
-                    </a:p>
-                    <a:p>
-                      <a:pPr algn="ctr">
-                        <a:lnSpc>
-                          <a:spcPct val="100000"/>
-                        </a:lnSpc>
-                        <a:spcBef>
-                          <a:spcPts val="0"/>
-                        </a:spcBef>
-                        <a:spcAft>
-                          <a:spcPts val="0"/>
-                        </a:spcAft>
-                      </a:pPr>
-                      <a:r>
-                        <a:rPr sz="1300" b="0">
-                          <a:solidFill>
-                            <a:srgbClr val="1F1F1F"/>
-                          </a:solidFill>
-                          <a:latin typeface="Calibri"/>
-                        </a:rPr>
-                        <a:t>documento aplicável</a:t>
+                        <a:t>-</a:t>
                       </a:r>
                     </a:p>
                   </a:txBody>
@@ -10773,7 +10025,7 @@
                   </a:tcPr>
                 </a:tc>
               </a:tr>
-              <a:tr h="470916">
+              <a:tr h="283464">
                 <a:tc>
                   <a:txBody>
                     <a:bodyPr wrap="square">
@@ -10846,29 +10098,7 @@
                           </a:solidFill>
                           <a:latin typeface="Calibri"/>
                         </a:rPr>
-                        <a:t>Não localizado nas cláusulas revisadas; requer</a:t>
-                      </a:r>
-                    </a:p>
-                    <a:p>
-                      <a:pPr algn="ctr">
-                        <a:lnSpc>
-                          <a:spcPct val="100000"/>
-                        </a:lnSpc>
-                        <a:spcBef>
-                          <a:spcPts val="0"/>
-                        </a:spcBef>
-                        <a:spcAft>
-                          <a:spcPts val="0"/>
-                        </a:spcAft>
-                      </a:pPr>
-                      <a:r>
-                        <a:rPr sz="1300" b="0">
-                          <a:solidFill>
-                            <a:srgbClr val="1F1F1F"/>
-                          </a:solidFill>
-                          <a:latin typeface="Calibri"/>
-                        </a:rPr>
-                        <a:t>documento aplicável</a:t>
+                        <a:t>-</a:t>
                       </a:r>
                     </a:p>
                   </a:txBody>
@@ -10938,7 +10168,7 @@
                   </a:tcPr>
                 </a:tc>
               </a:tr>
-              <a:tr h="470916">
+              <a:tr h="283464">
                 <a:tc>
                   <a:txBody>
                     <a:bodyPr wrap="square">
@@ -11013,29 +10243,7 @@
                           </a:solidFill>
                           <a:latin typeface="Calibri"/>
                         </a:rPr>
-                        <a:t>Não localizado nas cláusulas revisadas; requer</a:t>
-                      </a:r>
-                    </a:p>
-                    <a:p>
-                      <a:pPr algn="ctr">
-                        <a:lnSpc>
-                          <a:spcPct val="100000"/>
-                        </a:lnSpc>
-                        <a:spcBef>
-                          <a:spcPts val="0"/>
-                        </a:spcBef>
-                        <a:spcAft>
-                          <a:spcPts val="0"/>
-                        </a:spcAft>
-                      </a:pPr>
-                      <a:r>
-                        <a:rPr sz="1300" b="0">
-                          <a:solidFill>
-                            <a:srgbClr val="1F1F1F"/>
-                          </a:solidFill>
-                          <a:latin typeface="Calibri"/>
-                        </a:rPr>
-                        <a:t>documento aplicável</a:t>
+                        <a:t>-</a:t>
                       </a:r>
                     </a:p>
                   </a:txBody>
@@ -11289,7 +10497,7 @@
                       <a:r>
                         <a:rPr sz="1300" b="1">
                           <a:solidFill>
-                            <a:srgbClr val="1F1F1F"/>
+                            <a:srgbClr val="FFFFFF"/>
                           </a:solidFill>
                           <a:latin typeface="Calibri"/>
                         </a:rPr>
@@ -11299,7 +10507,7 @@
                   </a:txBody>
                   <a:tcPr marL="91440" marR="91440" marT="41148" marB="41148" anchor="ctr">
                     <a:solidFill>
-                      <a:srgbClr val="EC7000"/>
+                      <a:srgbClr val="FF6200"/>
                     </a:solidFill>
                     <a:lnL>
                       <a:noFill/>
@@ -11338,7 +10546,7 @@
                       <a:r>
                         <a:rPr sz="1300" b="1">
                           <a:solidFill>
-                            <a:srgbClr val="1F1F1F"/>
+                            <a:srgbClr val="FFFFFF"/>
                           </a:solidFill>
                           <a:latin typeface="Calibri"/>
                         </a:rPr>
@@ -11348,7 +10556,7 @@
                   </a:txBody>
                   <a:tcPr marL="91440" marR="91440" marT="41148" marB="41148" anchor="ctr">
                     <a:solidFill>
-                      <a:srgbClr val="EC7000"/>
+                      <a:srgbClr val="FF6200"/>
                     </a:solidFill>
                     <a:lnL>
                       <a:noFill/>
@@ -11387,7 +10595,7 @@
                       <a:r>
                         <a:rPr sz="1300" b="1">
                           <a:solidFill>
-                            <a:srgbClr val="1F1F1F"/>
+                            <a:srgbClr val="FFFFFF"/>
                           </a:solidFill>
                           <a:latin typeface="Calibri"/>
                         </a:rPr>
@@ -11397,7 +10605,7 @@
                   </a:txBody>
                   <a:tcPr marL="91440" marR="91440" marT="41148" marB="41148" anchor="ctr">
                     <a:solidFill>
-                      <a:srgbClr val="EC7000"/>
+                      <a:srgbClr val="FF6200"/>
                     </a:solidFill>
                     <a:lnL>
                       <a:noFill/>
@@ -11511,29 +10719,7 @@
                           </a:solidFill>
                           <a:latin typeface="Calibri"/>
                         </a:rPr>
-                        <a:t>DC/PL e composição de cotas ajudam; validar</a:t>
-                      </a:r>
-                    </a:p>
-                    <a:p>
-                      <a:pPr algn="ctr">
-                        <a:lnSpc>
-                          <a:spcPct val="100000"/>
-                        </a:lnSpc>
-                        <a:spcBef>
-                          <a:spcPts val="0"/>
-                        </a:spcBef>
-                        <a:spcAft>
-                          <a:spcPts val="0"/>
-                        </a:spcAft>
-                      </a:pPr>
-                      <a:r>
-                        <a:rPr sz="1300" b="0">
-                          <a:solidFill>
-                            <a:srgbClr val="1F1F1F"/>
-                          </a:solidFill>
-                          <a:latin typeface="Calibri"/>
-                        </a:rPr>
-                        <a:t>numerador, denominador e versão contratual</a:t>
+                        <a:t>DC/PL e composição de cotas ajudam</a:t>
                       </a:r>
                     </a:p>
                   </a:txBody>
@@ -11580,29 +10766,7 @@
                           </a:solidFill>
                           <a:latin typeface="Calibri"/>
                         </a:rPr>
-                        <a:t>DC/PL e composição de cotas ajudam; validar</a:t>
-                      </a:r>
-                    </a:p>
-                    <a:p>
-                      <a:pPr algn="ctr">
-                        <a:lnSpc>
-                          <a:spcPct val="100000"/>
-                        </a:lnSpc>
-                        <a:spcBef>
-                          <a:spcPts val="0"/>
-                        </a:spcBef>
-                        <a:spcAft>
-                          <a:spcPts val="0"/>
-                        </a:spcAft>
-                      </a:pPr>
-                      <a:r>
-                        <a:rPr sz="1300" b="0">
-                          <a:solidFill>
-                            <a:srgbClr val="1F1F1F"/>
-                          </a:solidFill>
-                          <a:latin typeface="Calibri"/>
-                        </a:rPr>
-                        <a:t>numerador, denominador e versão contratual</a:t>
+                        <a:t>DC/PL e composição de cotas ajudam</a:t>
                       </a:r>
                     </a:p>
                   </a:txBody>
@@ -12074,7 +11238,7 @@
                           </a:solidFill>
                           <a:latin typeface="Calibri"/>
                         </a:rPr>
-                        <a:t>Sem competência IME carregada em cache local</a:t>
+                        <a:t>-</a:t>
                       </a:r>
                     </a:p>
                   </a:txBody>
@@ -12123,7 +11287,7 @@
                           </a:solidFill>
                           <a:latin typeface="Calibri"/>
                         </a:rPr>
-                        <a:t>Sem competência IME carregada em cache local</a:t>
+                        <a:t>-</a:t>
                       </a:r>
                     </a:p>
                   </a:txBody>
